--- a/entregas/posts/site/kit/editavel/efeito-rebote-seg-19-10.pptx
+++ b/entregas/posts/site/kit/editavel/efeito-rebote-seg-19-10.pptx
@@ -4149,7 +4149,7 @@
         </p:nvSpPr>
         <p:spPr>
           <a:xfrm>
-            <a:off x="915442" y="4426389"/>
+            <a:off x="915442" y="4365490"/>
             <a:ext cx="4794840" cy="304495"/>
           </a:xfrm>
           <a:prstGeom prst="rect">
@@ -4175,13 +4175,13 @@
               </a:spcAft>
             </a:pPr>
             <a:r>
-              <a:rPr b="0" i="0" sz="2397" lang="pt-BR">
+              <a:rPr b="1" i="0" sz="2397" lang="pt-BR">
                 <a:solidFill>
                   <a:srgbClr val="E9C46A"/>
                 </a:solidFill>
-                <a:latin typeface="Barlow SemiBold"/>
-                <a:ea typeface="Barlow SemiBold"/>
-                <a:cs typeface="Barlow SemiBold"/>
+                <a:latin typeface="Barlow"/>
+                <a:ea typeface="Barlow"/>
+                <a:cs typeface="Barlow"/>
               </a:rPr>
               <a:t>Série Entenda o projeto · parte 4</a:t>
             </a:r>
@@ -4196,7 +4196,7 @@
         </p:nvSpPr>
         <p:spPr>
           <a:xfrm>
-            <a:off x="915442" y="5181836"/>
+            <a:off x="915442" y="4905735"/>
             <a:ext cx="7172905" cy="3689747"/>
           </a:xfrm>
           <a:prstGeom prst="rect">
@@ -4267,7 +4267,7 @@
         </p:nvSpPr>
         <p:spPr>
           <a:xfrm>
-            <a:off x="915442" y="9055278"/>
+            <a:off x="915442" y="9095294"/>
             <a:ext cx="4406354" cy="520214"/>
           </a:xfrm>
           <a:prstGeom prst="rect">
@@ -4314,7 +4314,7 @@
         </p:nvSpPr>
         <p:spPr>
           <a:xfrm>
-            <a:off x="915442" y="11515339"/>
+            <a:off x="915442" y="11496308"/>
             <a:ext cx="1210717" cy="437712"/>
           </a:xfrm>
           <a:prstGeom prst="rect">
@@ -4830,7 +4830,7 @@
         </p:nvSpPr>
         <p:spPr>
           <a:xfrm>
-            <a:off x="915442" y="1079840"/>
+            <a:off x="915442" y="1018941"/>
             <a:ext cx="2955384" cy="304495"/>
           </a:xfrm>
           <a:prstGeom prst="rect">
@@ -4856,13 +4856,13 @@
               </a:spcAft>
             </a:pPr>
             <a:r>
-              <a:rPr b="0" i="0" sz="2397" lang="pt-BR">
+              <a:rPr b="1" i="0" sz="2397" lang="pt-BR">
                 <a:solidFill>
                   <a:srgbClr val="B5121B"/>
                 </a:solidFill>
-                <a:latin typeface="Barlow SemiBold"/>
-                <a:ea typeface="Barlow SemiBold"/>
-                <a:cs typeface="Barlow SemiBold"/>
+                <a:latin typeface="Barlow"/>
+                <a:ea typeface="Barlow"/>
+                <a:cs typeface="Barlow"/>
               </a:rPr>
               <a:t>O caminho da conta</a:t>
             </a:r>
@@ -4877,7 +4877,7 @@
         </p:nvSpPr>
         <p:spPr>
           <a:xfrm>
-            <a:off x="915442" y="2676496"/>
+            <a:off x="915442" y="2466929"/>
             <a:ext cx="7129686" cy="1867049"/>
           </a:xfrm>
           <a:prstGeom prst="rect">
@@ -4936,7 +4936,7 @@
         </p:nvSpPr>
         <p:spPr>
           <a:xfrm>
-            <a:off x="1488378" y="4990826"/>
+            <a:off x="1488378" y="5220226"/>
             <a:ext cx="195218" cy="686143"/>
           </a:xfrm>
           <a:prstGeom prst="rect">
@@ -4983,7 +4983,7 @@
         </p:nvSpPr>
         <p:spPr>
           <a:xfrm>
-            <a:off x="2175867" y="5165655"/>
+            <a:off x="2175867" y="5205671"/>
             <a:ext cx="6902455" cy="520214"/>
           </a:xfrm>
           <a:prstGeom prst="rect">
@@ -5030,7 +5030,7 @@
         </p:nvSpPr>
         <p:spPr>
           <a:xfrm>
-            <a:off x="1456283" y="6455593"/>
+            <a:off x="1456283" y="6684993"/>
             <a:ext cx="259556" cy="686143"/>
           </a:xfrm>
           <a:prstGeom prst="rect">
@@ -5077,7 +5077,7 @@
         </p:nvSpPr>
         <p:spPr>
           <a:xfrm>
-            <a:off x="2175867" y="6630421"/>
+            <a:off x="2175867" y="6670438"/>
             <a:ext cx="4823653" cy="520214"/>
           </a:xfrm>
           <a:prstGeom prst="rect">
@@ -5124,7 +5124,7 @@
         </p:nvSpPr>
         <p:spPr>
           <a:xfrm>
-            <a:off x="1456618" y="7920359"/>
+            <a:off x="1456618" y="8149759"/>
             <a:ext cx="258738" cy="686143"/>
           </a:xfrm>
           <a:prstGeom prst="rect">
@@ -5171,7 +5171,7 @@
         </p:nvSpPr>
         <p:spPr>
           <a:xfrm>
-            <a:off x="2175867" y="8095188"/>
+            <a:off x="2175867" y="8135204"/>
             <a:ext cx="4088264" cy="520214"/>
           </a:xfrm>
           <a:prstGeom prst="rect">
@@ -5218,7 +5218,7 @@
         </p:nvSpPr>
         <p:spPr>
           <a:xfrm>
-            <a:off x="1243012" y="9477057"/>
+            <a:off x="1243012" y="9517073"/>
             <a:ext cx="8606686" cy="520214"/>
           </a:xfrm>
           <a:prstGeom prst="rect">
@@ -5265,7 +5265,7 @@
         </p:nvSpPr>
         <p:spPr>
           <a:xfrm>
-            <a:off x="915442" y="11515339"/>
+            <a:off x="915442" y="11496308"/>
             <a:ext cx="3551947" cy="437712"/>
           </a:xfrm>
           <a:prstGeom prst="rect">
@@ -5571,7 +5571,7 @@
         </p:nvSpPr>
         <p:spPr>
           <a:xfrm>
-            <a:off x="915442" y="1079840"/>
+            <a:off x="915442" y="1018941"/>
             <a:ext cx="2281877" cy="304495"/>
           </a:xfrm>
           <a:prstGeom prst="rect">
@@ -5597,13 +5597,13 @@
               </a:spcAft>
             </a:pPr>
             <a:r>
-              <a:rPr b="0" i="0" sz="2397" lang="pt-BR">
+              <a:rPr b="1" i="0" sz="2397" lang="pt-BR">
                 <a:solidFill>
                   <a:srgbClr val="B5121B"/>
                 </a:solidFill>
-                <a:latin typeface="Barlow SemiBold"/>
-                <a:ea typeface="Barlow SemiBold"/>
-                <a:cs typeface="Barlow SemiBold"/>
+                <a:latin typeface="Barlow"/>
+                <a:ea typeface="Barlow"/>
+                <a:cs typeface="Barlow"/>
               </a:rPr>
               <a:t>Outra pesquisa</a:t>
             </a:r>
@@ -5618,7 +5618,7 @@
         </p:nvSpPr>
         <p:spPr>
           <a:xfrm>
-            <a:off x="915442" y="3449956"/>
+            <a:off x="915442" y="3240389"/>
             <a:ext cx="8173343" cy="1867049"/>
           </a:xfrm>
           <a:prstGeom prst="rect">
@@ -5677,7 +5677,7 @@
         </p:nvSpPr>
         <p:spPr>
           <a:xfrm>
-            <a:off x="1353145" y="5946838"/>
+            <a:off x="1353145" y="6018868"/>
             <a:ext cx="7341549" cy="2208908"/>
           </a:xfrm>
           <a:prstGeom prst="rect">
@@ -5746,7 +5746,7 @@
         </p:nvSpPr>
         <p:spPr>
           <a:xfrm>
-            <a:off x="915442" y="8935605"/>
+            <a:off x="915442" y="9007635"/>
             <a:ext cx="7041446" cy="552227"/>
           </a:xfrm>
           <a:prstGeom prst="rect">
@@ -5793,7 +5793,7 @@
         </p:nvSpPr>
         <p:spPr>
           <a:xfrm>
-            <a:off x="915442" y="11515339"/>
+            <a:off x="915442" y="11496308"/>
             <a:ext cx="4083680" cy="437712"/>
           </a:xfrm>
           <a:prstGeom prst="rect">
@@ -6099,7 +6099,7 @@
         </p:nvSpPr>
         <p:spPr>
           <a:xfrm>
-            <a:off x="915442" y="1079840"/>
+            <a:off x="915442" y="1018941"/>
             <a:ext cx="1402095" cy="304495"/>
           </a:xfrm>
           <a:prstGeom prst="rect">
@@ -6125,13 +6125,13 @@
               </a:spcAft>
             </a:pPr>
             <a:r>
-              <a:rPr b="0" i="0" sz="2397" lang="pt-BR">
+              <a:rPr b="1" i="0" sz="2397" lang="pt-BR">
                 <a:solidFill>
                   <a:srgbClr val="B5121B"/>
                 </a:solidFill>
-                <a:latin typeface="Barlow SemiBold"/>
-                <a:ea typeface="Barlow SemiBold"/>
-                <a:cs typeface="Barlow SemiBold"/>
+                <a:latin typeface="Barlow"/>
+                <a:ea typeface="Barlow"/>
+                <a:cs typeface="Barlow"/>
               </a:rPr>
               <a:t>O vínculo</a:t>
             </a:r>
@@ -6146,7 +6146,7 @@
         </p:nvSpPr>
         <p:spPr>
           <a:xfrm>
-            <a:off x="915442" y="3173880"/>
+            <a:off x="915442" y="2964313"/>
             <a:ext cx="7452360" cy="1867049"/>
           </a:xfrm>
           <a:prstGeom prst="rect">
@@ -6205,7 +6205,7 @@
         </p:nvSpPr>
         <p:spPr>
           <a:xfrm>
-            <a:off x="1353145" y="5670762"/>
+            <a:off x="1353145" y="5742792"/>
             <a:ext cx="7759458" cy="2208908"/>
           </a:xfrm>
           <a:prstGeom prst="rect">
@@ -6274,7 +6274,7 @@
         </p:nvSpPr>
         <p:spPr>
           <a:xfrm>
-            <a:off x="915442" y="8659528"/>
+            <a:off x="915442" y="8731558"/>
             <a:ext cx="7755514" cy="1104454"/>
           </a:xfrm>
           <a:prstGeom prst="rect">
@@ -6321,7 +6321,7 @@
         </p:nvSpPr>
         <p:spPr>
           <a:xfrm>
-            <a:off x="915442" y="11515339"/>
+            <a:off x="915442" y="11496308"/>
             <a:ext cx="3943052" cy="437712"/>
           </a:xfrm>
           <a:prstGeom prst="rect">
@@ -6594,7 +6594,7 @@
         </p:nvSpPr>
         <p:spPr>
           <a:xfrm>
-            <a:off x="915442" y="1079840"/>
+            <a:off x="915442" y="1018941"/>
             <a:ext cx="2755657" cy="304495"/>
           </a:xfrm>
           <a:prstGeom prst="rect">
@@ -6620,13 +6620,13 @@
               </a:spcAft>
             </a:pPr>
             <a:r>
-              <a:rPr b="0" i="0" sz="2397" lang="pt-BR">
+              <a:rPr b="1" i="0" sz="2397" lang="pt-BR">
                 <a:solidFill>
                   <a:srgbClr val="B5121B"/>
                 </a:solidFill>
-                <a:latin typeface="Barlow SemiBold"/>
-                <a:ea typeface="Barlow SemiBold"/>
-                <a:cs typeface="Barlow SemiBold"/>
+                <a:latin typeface="Barlow"/>
+                <a:ea typeface="Barlow"/>
+                <a:cs typeface="Barlow"/>
               </a:rPr>
               <a:t>O que vamos fazer</a:t>
             </a:r>
@@ -6641,7 +6641,7 @@
         </p:nvSpPr>
         <p:spPr>
           <a:xfrm>
-            <a:off x="915442" y="5058788"/>
+            <a:off x="915442" y="4849221"/>
             <a:ext cx="7537326" cy="933524"/>
           </a:xfrm>
           <a:prstGeom prst="rect">
@@ -6688,7 +6688,7 @@
         </p:nvSpPr>
         <p:spPr>
           <a:xfrm>
-            <a:off x="915442" y="6222617"/>
+            <a:off x="915442" y="6294647"/>
             <a:ext cx="7975259" cy="1656681"/>
           </a:xfrm>
           <a:prstGeom prst="rect">
@@ -6735,7 +6735,7 @@
         </p:nvSpPr>
         <p:spPr>
           <a:xfrm>
-            <a:off x="915442" y="11515488"/>
+            <a:off x="915442" y="11496457"/>
             <a:ext cx="1849517" cy="437712"/>
           </a:xfrm>
           <a:prstGeom prst="rect">
@@ -6863,7 +6863,7 @@
         </p:nvSpPr>
         <p:spPr>
           <a:xfrm>
-            <a:off x="3082260" y="5430830"/>
+            <a:off x="3082260" y="5369931"/>
             <a:ext cx="4122480" cy="304495"/>
           </a:xfrm>
           <a:prstGeom prst="rect">
@@ -6889,13 +6889,13 @@
               </a:spcAft>
             </a:pPr>
             <a:r>
-              <a:rPr b="0" i="0" sz="2397" lang="pt-BR">
+              <a:rPr b="1" i="0" sz="2397" lang="pt-BR">
                 <a:solidFill>
                   <a:srgbClr val="E9C46A"/>
                 </a:solidFill>
-                <a:latin typeface="Barlow SemiBold"/>
-                <a:ea typeface="Barlow SemiBold"/>
-                <a:cs typeface="Barlow SemiBold"/>
+                <a:latin typeface="Barlow"/>
+                <a:ea typeface="Barlow"/>
+                <a:cs typeface="Barlow"/>
               </a:rPr>
               <a:t>Na quarta, conheça a turma</a:t>
             </a:r>
@@ -6910,7 +6910,7 @@
         </p:nvSpPr>
         <p:spPr>
           <a:xfrm>
-            <a:off x="1640949" y="6199556"/>
+            <a:off x="1640949" y="5989989"/>
             <a:ext cx="7005102" cy="1867049"/>
           </a:xfrm>
           <a:prstGeom prst="rect">
@@ -6969,7 +6969,7 @@
         </p:nvSpPr>
         <p:spPr>
           <a:xfrm>
-            <a:off x="2531872" y="8670860"/>
+            <a:off x="2531872" y="8572105"/>
             <a:ext cx="5223108" cy="493776"/>
           </a:xfrm>
           <a:prstGeom prst="rect">
